--- a/Slides/Semana 15/semana_15_slides.pptx
+++ b/Slides/Semana 15/semana_15_slides.pptx
@@ -798,7 +798,7 @@
 - "O que os registros mostram que vocês não esperavam?"
 - "Que lacuna de documentação vocês ainda conseguem resolver esta semana?"
 Avaliação nesta semana: observação central de Documentação (completude e organização dos registros de todas as etapas) e continuidade de Execução (grau de conclusão e tratamento de lacunas). Observam-se também Gestão do Projeto (fechamento formal da etapa) e o início de Reflexão Crítica (qualidade da leitura preliminar).
-Fonte: Plano Semanal Semana 15, Cronograma (Semana 15), CLAUDE.md, COURSE_CONTEXT.md, PEDAGOGICAL_RULES.md, EXTENSION_PROJECT_GUIDE.md, Plano Semanal Semana 14 (continuidade).</a:t>
+Fonte: Plano Semanal Semana 15, Cronograma (Semana 15), Plano Semanal Semana 14 (continuidade).</a:t>
             </a:r>
             <a:endParaRPr lang="en-US" dirty="0"/>
           </a:p>
